--- a/report/poster/poster_en_a4_large_text.pptx
+++ b/report/poster/poster_en_a4_large_text.pptx
@@ -2799,7 +2799,15 @@
           <c:idx val="0"/>
           <c:order val="0"/>
           <c:tx>
-            <c:v>DeepJSCC-Q</c:v>
+            <c:strRef>
+              <c:f>Sheet1!$B$1</c:f>
+              <c:strCache>
+                <c:ptCount val="1"/>
+                <c:pt idx="0">
+                  <c:v>DeepJSCC-Q</c:v>
+                </c:pt>
+              </c:strCache>
+            </c:strRef>
           </c:tx>
           <c:spPr>
             <a:ln xmlns:a="http://schemas.openxmlformats.org/drawingml/2006/main" w="10160">
@@ -2819,192 +2827,228 @@
           </c:marker>
           <c:xVal>
             <c:numRef>
-              <c:f>'Chart Data'!$A$2:$A$30</c:f>
+              <c:f>Sheet1!$A$2:$A$36</c:f>
               <c:numCache>
                 <c:formatCode>General</c:formatCode>
-                <c:ptCount val="29"/>
+                <c:ptCount val="35"/>
                 <c:pt idx="0">
-                  <c:v>5.51</c:v>
+                  <c:v>2.94</c:v>
                 </c:pt>
                 <c:pt idx="1">
-                  <c:v>6.56</c:v>
+                  <c:v>4.94</c:v>
                 </c:pt>
                 <c:pt idx="2">
-                  <c:v>9.5</c:v>
+                  <c:v>5.9</c:v>
                 </c:pt>
                 <c:pt idx="3">
-                  <c:v>11.41</c:v>
+                  <c:v>7.03</c:v>
                 </c:pt>
                 <c:pt idx="4">
-                  <c:v>12.91</c:v>
+                  <c:v>8.43</c:v>
                 </c:pt>
                 <c:pt idx="5">
-                  <c:v>14.49</c:v>
+                  <c:v>9.3</c:v>
                 </c:pt>
                 <c:pt idx="6">
-                  <c:v>14.65</c:v>
+                  <c:v>10.49</c:v>
                 </c:pt>
                 <c:pt idx="7">
-                  <c:v>15.51</c:v>
+                  <c:v>11.48</c:v>
                 </c:pt>
                 <c:pt idx="8">
-                  <c:v>15.84</c:v>
+                  <c:v>12.48</c:v>
                 </c:pt>
                 <c:pt idx="9">
-                  <c:v>16.99</c:v>
+                  <c:v>13.02</c:v>
                 </c:pt>
                 <c:pt idx="10">
-                  <c:v>17.72</c:v>
+                  <c:v>13.74</c:v>
                 </c:pt>
                 <c:pt idx="11">
-                  <c:v>18.87</c:v>
+                  <c:v>14.18</c:v>
                 </c:pt>
                 <c:pt idx="12">
-                  <c:v>19.51</c:v>
+                  <c:v>15.76</c:v>
                 </c:pt>
                 <c:pt idx="13">
-                  <c:v>19.74</c:v>
+                  <c:v>16.33</c:v>
                 </c:pt>
                 <c:pt idx="14">
-                  <c:v>19.95</c:v>
+                  <c:v>17.03</c:v>
                 </c:pt>
                 <c:pt idx="15">
-                  <c:v>20.09</c:v>
+                  <c:v>17.36</c:v>
                 </c:pt>
                 <c:pt idx="16">
-                  <c:v>20.73</c:v>
+                  <c:v>17.38</c:v>
                 </c:pt>
                 <c:pt idx="17">
-                  <c:v>21.06</c:v>
+                  <c:v>18.45</c:v>
                 </c:pt>
                 <c:pt idx="18">
-                  <c:v>21.55</c:v>
+                  <c:v>18.91</c:v>
                 </c:pt>
                 <c:pt idx="19">
+                  <c:v>19.54</c:v>
+                </c:pt>
+                <c:pt idx="20">
+                  <c:v>19.68</c:v>
+                </c:pt>
+                <c:pt idx="21">
+                  <c:v>20.79</c:v>
+                </c:pt>
+                <c:pt idx="22">
+                  <c:v>21.31</c:v>
+                </c:pt>
+                <c:pt idx="23">
                   <c:v>22.48</c:v>
                 </c:pt>
-                <c:pt idx="20">
-                  <c:v>23.03</c:v>
-                </c:pt>
-                <c:pt idx="21">
-                  <c:v>23.66</c:v>
-                </c:pt>
-                <c:pt idx="22">
-                  <c:v>24.46</c:v>
-                </c:pt>
-                <c:pt idx="23">
-                  <c:v>26.13</c:v>
-                </c:pt>
                 <c:pt idx="24">
-                  <c:v>27.53</c:v>
+                  <c:v>23.1</c:v>
                 </c:pt>
                 <c:pt idx="25">
-                  <c:v>28.18</c:v>
+                  <c:v>23.24</c:v>
                 </c:pt>
                 <c:pt idx="26">
-                  <c:v>30.2</c:v>
+                  <c:v>24.49</c:v>
                 </c:pt>
                 <c:pt idx="27">
-                  <c:v>31.37</c:v>
+                  <c:v>26.5</c:v>
                 </c:pt>
                 <c:pt idx="28">
-                  <c:v>32.07</c:v>
+                  <c:v>27.69</c:v>
+                </c:pt>
+                <c:pt idx="29">
+                  <c:v>29.56</c:v>
+                </c:pt>
+                <c:pt idx="30">
+                  <c:v>31.97</c:v>
+                </c:pt>
+                <c:pt idx="31">
+                  <c:v>34.43</c:v>
+                </c:pt>
+                <c:pt idx="32">
+                  <c:v>35.2</c:v>
+                </c:pt>
+                <c:pt idx="33">
+                  <c:v>36.14</c:v>
+                </c:pt>
+                <c:pt idx="34">
+                  <c:v>36.49</c:v>
                 </c:pt>
               </c:numCache>
             </c:numRef>
           </c:xVal>
           <c:yVal>
             <c:numRef>
-              <c:f>'Chart Data'!$B$2:$B$30</c:f>
+              <c:f>Sheet1!$B$2:$B$36</c:f>
               <c:numCache>
-                <c:formatCode>0</c:formatCode>
-                <c:ptCount val="29"/>
+                <c:formatCode>General</c:formatCode>
+                <c:ptCount val="35"/>
                 <c:pt idx="0">
-                  <c:v>26.54</c:v>
+                  <c:v>23.51</c:v>
                 </c:pt>
                 <c:pt idx="1">
-                  <c:v>27.95</c:v>
+                  <c:v>25.58</c:v>
                 </c:pt>
                 <c:pt idx="2">
-                  <c:v>29.75</c:v>
+                  <c:v>26.94</c:v>
                 </c:pt>
                 <c:pt idx="3">
-                  <c:v>30.87</c:v>
+                  <c:v>28.22</c:v>
                 </c:pt>
                 <c:pt idx="4">
-                  <c:v>31.19</c:v>
+                  <c:v>29.1</c:v>
                 </c:pt>
                 <c:pt idx="5">
-                  <c:v>31.48</c:v>
+                  <c:v>29.77</c:v>
                 </c:pt>
                 <c:pt idx="6">
-                  <c:v>31.41</c:v>
+                  <c:v>30.4</c:v>
                 </c:pt>
                 <c:pt idx="7">
-                  <c:v>31.53</c:v>
+                  <c:v>30.72</c:v>
                 </c:pt>
                 <c:pt idx="8">
-                  <c:v>31.57</c:v>
+                  <c:v>30.96</c:v>
                 </c:pt>
                 <c:pt idx="9">
-                  <c:v>31.66</c:v>
+                  <c:v>31.01</c:v>
                 </c:pt>
                 <c:pt idx="10">
-                  <c:v>31.71</c:v>
+                  <c:v>31.22</c:v>
                 </c:pt>
                 <c:pt idx="11">
-                  <c:v>31.78</c:v>
+                  <c:v>31.46</c:v>
                 </c:pt>
                 <c:pt idx="12">
-                  <c:v>31.82</c:v>
+                  <c:v>31.49</c:v>
                 </c:pt>
                 <c:pt idx="13">
-                  <c:v>31.82</c:v>
+                  <c:v>31.68</c:v>
                 </c:pt>
                 <c:pt idx="14">
-                  <c:v>31.82</c:v>
+                  <c:v>31.74</c:v>
                 </c:pt>
                 <c:pt idx="15">
-                  <c:v>31.84</c:v>
+                  <c:v>31.79</c:v>
                 </c:pt>
                 <c:pt idx="16">
-                  <c:v>31.86</c:v>
+                  <c:v>31.8</c:v>
                 </c:pt>
                 <c:pt idx="17">
                   <c:v>31.87</c:v>
                 </c:pt>
                 <c:pt idx="18">
-                  <c:v>31.89</c:v>
+                  <c:v>31.91</c:v>
                 </c:pt>
                 <c:pt idx="19">
-                  <c:v>31.93</c:v>
+                  <c:v>31.94</c:v>
                 </c:pt>
                 <c:pt idx="20">
-                  <c:v>31.92</c:v>
+                  <c:v>31.95</c:v>
                 </c:pt>
                 <c:pt idx="21">
-                  <c:v>31.92</c:v>
+                  <c:v>32.0</c:v>
                 </c:pt>
                 <c:pt idx="22">
-                  <c:v>31.95</c:v>
+                  <c:v>32.03</c:v>
                 </c:pt>
                 <c:pt idx="23">
-                  <c:v>31.96</c:v>
+                  <c:v>32.07</c:v>
                 </c:pt>
                 <c:pt idx="24">
-                  <c:v>31.96</c:v>
+                  <c:v>32.09</c:v>
                 </c:pt>
                 <c:pt idx="25">
-                  <c:v>31.98</c:v>
+                  <c:v>32.1</c:v>
                 </c:pt>
                 <c:pt idx="26">
-                  <c:v>31.99</c:v>
+                  <c:v>32.13</c:v>
                 </c:pt>
                 <c:pt idx="27">
-                  <c:v>31.99</c:v>
+                  <c:v>32.16</c:v>
                 </c:pt>
                 <c:pt idx="28">
-                  <c:v>31.99</c:v>
+                  <c:v>32.17</c:v>
+                </c:pt>
+                <c:pt idx="29">
+                  <c:v>32.19</c:v>
+                </c:pt>
+                <c:pt idx="30">
+                  <c:v>32.2</c:v>
+                </c:pt>
+                <c:pt idx="31">
+                  <c:v>32.21</c:v>
+                </c:pt>
+                <c:pt idx="32">
+                  <c:v>32.21</c:v>
+                </c:pt>
+                <c:pt idx="33">
+                  <c:v>32.21</c:v>
+                </c:pt>
+                <c:pt idx="34">
+                  <c:v>32.21</c:v>
                 </c:pt>
               </c:numCache>
             </c:numRef>
@@ -3015,7 +3059,15 @@
           <c:idx val="1"/>
           <c:order val="1"/>
           <c:tx>
-            <c:v>SSCC</c:v>
+            <c:strRef>
+              <c:f>Sheet1!$B$38</c:f>
+              <c:strCache>
+                <c:ptCount val="1"/>
+                <c:pt idx="0">
+                  <c:v>SSCC</c:v>
+                </c:pt>
+              </c:strCache>
+            </c:strRef>
           </c:tx>
           <c:spPr>
             <a:ln xmlns:a="http://schemas.openxmlformats.org/drawingml/2006/main" w="10160">
@@ -3035,192 +3087,210 @@
           </c:marker>
           <c:xVal>
             <c:numRef>
-              <c:f>'Chart Data'!$C$2:$C$30</c:f>
+              <c:f>Sheet1!$A$39:$A$70</c:f>
               <c:numCache>
                 <c:formatCode>General</c:formatCode>
-                <c:ptCount val="29"/>
+                <c:ptCount val="32"/>
                 <c:pt idx="0">
-                  <c:v>5.4</c:v>
+                  <c:v>5.15</c:v>
                 </c:pt>
                 <c:pt idx="1">
-                  <c:v>6.9</c:v>
+                  <c:v>7.91</c:v>
                 </c:pt>
                 <c:pt idx="2">
-                  <c:v>7.82</c:v>
+                  <c:v>9.21</c:v>
                 </c:pt>
                 <c:pt idx="3">
-                  <c:v>11.3</c:v>
+                  <c:v>9.62</c:v>
                 </c:pt>
                 <c:pt idx="4">
-                  <c:v>13.38</c:v>
+                  <c:v>10.52</c:v>
                 </c:pt>
                 <c:pt idx="5">
-                  <c:v>15.63</c:v>
+                  <c:v>13.67</c:v>
                 </c:pt>
                 <c:pt idx="6">
-                  <c:v>15.63</c:v>
+                  <c:v>14.51</c:v>
                 </c:pt>
                 <c:pt idx="7">
-                  <c:v>16.62</c:v>
+                  <c:v>16.17</c:v>
                 </c:pt>
                 <c:pt idx="8">
-                  <c:v>16.74</c:v>
+                  <c:v>16.55</c:v>
                 </c:pt>
                 <c:pt idx="9">
-                  <c:v>17.71</c:v>
+                  <c:v>18.84</c:v>
                 </c:pt>
                 <c:pt idx="10">
-                  <c:v>19.04</c:v>
+                  <c:v>19.02</c:v>
                 </c:pt>
                 <c:pt idx="11">
-                  <c:v>19.5</c:v>
+                  <c:v>19.15</c:v>
                 </c:pt>
                 <c:pt idx="12">
-                  <c:v>19.59</c:v>
+                  <c:v>19.4</c:v>
                 </c:pt>
                 <c:pt idx="13">
-                  <c:v>19.77</c:v>
+                  <c:v>19.56</c:v>
                 </c:pt>
                 <c:pt idx="14">
-                  <c:v>20.04</c:v>
+                  <c:v>19.96</c:v>
                 </c:pt>
                 <c:pt idx="15">
-                  <c:v>21.19</c:v>
+                  <c:v>20.31</c:v>
                 </c:pt>
                 <c:pt idx="16">
-                  <c:v>22.35</c:v>
+                  <c:v>20.94</c:v>
                 </c:pt>
                 <c:pt idx="17">
-                  <c:v>22.7</c:v>
+                  <c:v>21.77</c:v>
                 </c:pt>
                 <c:pt idx="18">
-                  <c:v>23.01</c:v>
+                  <c:v>21.85</c:v>
                 </c:pt>
                 <c:pt idx="19">
-                  <c:v>23.11</c:v>
+                  <c:v>22.67</c:v>
                 </c:pt>
                 <c:pt idx="20">
-                  <c:v>23.83</c:v>
+                  <c:v>25.13</c:v>
                 </c:pt>
                 <c:pt idx="21">
-                  <c:v>24.24</c:v>
+                  <c:v>25.71</c:v>
                 </c:pt>
                 <c:pt idx="22">
-                  <c:v>24.82</c:v>
+                  <c:v>27.49</c:v>
                 </c:pt>
                 <c:pt idx="23">
-                  <c:v>26.7</c:v>
+                  <c:v>28.02</c:v>
                 </c:pt>
                 <c:pt idx="24">
-                  <c:v>28.15</c:v>
+                  <c:v>28.64</c:v>
                 </c:pt>
                 <c:pt idx="25">
-                  <c:v>29.92</c:v>
+                  <c:v>30.27</c:v>
                 </c:pt>
                 <c:pt idx="26">
-                  <c:v>31.11</c:v>
+                  <c:v>32.4</c:v>
                 </c:pt>
                 <c:pt idx="27">
-                  <c:v>31.93</c:v>
+                  <c:v>34.48</c:v>
                 </c:pt>
                 <c:pt idx="28">
-                  <c:v>32.47</c:v>
+                  <c:v>35.22</c:v>
+                </c:pt>
+                <c:pt idx="29">
+                  <c:v>35.76</c:v>
+                </c:pt>
+                <c:pt idx="30">
+                  <c:v>36.11</c:v>
+                </c:pt>
+                <c:pt idx="31">
+                  <c:v>36.85</c:v>
                 </c:pt>
               </c:numCache>
             </c:numRef>
           </c:xVal>
           <c:yVal>
             <c:numRef>
-              <c:f>'Chart Data'!$D$2:$D$30</c:f>
+              <c:f>Sheet1!$B$39:$B$70</c:f>
               <c:numCache>
-                <c:formatCode>0</c:formatCode>
-                <c:ptCount val="29"/>
+                <c:formatCode>General</c:formatCode>
+                <c:ptCount val="32"/>
                 <c:pt idx="0">
+                  <c:v>9.62</c:v>
+                </c:pt>
+                <c:pt idx="1">
+                  <c:v>9.54</c:v>
+                </c:pt>
+                <c:pt idx="2">
+                  <c:v>9.59</c:v>
+                </c:pt>
+                <c:pt idx="3">
                   <c:v>9.65</c:v>
                 </c:pt>
-                <c:pt idx="1">
-                  <c:v>9.65</c:v>
-                </c:pt>
-                <c:pt idx="2">
+                <c:pt idx="4">
                   <c:v>9.64</c:v>
                 </c:pt>
-                <c:pt idx="3">
-                  <c:v>8.87</c:v>
-                </c:pt>
-                <c:pt idx="4">
-                  <c:v>8.55</c:v>
-                </c:pt>
                 <c:pt idx="5">
-                  <c:v>8.52</c:v>
+                  <c:v>14.04</c:v>
                 </c:pt>
                 <c:pt idx="6">
-                  <c:v>8.79</c:v>
+                  <c:v>9.5</c:v>
                 </c:pt>
                 <c:pt idx="7">
-                  <c:v>8.79</c:v>
+                  <c:v>9.12</c:v>
                 </c:pt>
                 <c:pt idx="8">
-                  <c:v>13.88</c:v>
+                  <c:v>9.34</c:v>
                 </c:pt>
                 <c:pt idx="9">
-                  <c:v>21.83</c:v>
+                  <c:v>27.78</c:v>
                 </c:pt>
                 <c:pt idx="10">
-                  <c:v>25.12</c:v>
+                  <c:v>28.3</c:v>
                 </c:pt>
                 <c:pt idx="11">
-                  <c:v>26.78</c:v>
+                  <c:v>28.15</c:v>
                 </c:pt>
                 <c:pt idx="12">
-                  <c:v>27.62</c:v>
+                  <c:v>25.04</c:v>
                 </c:pt>
                 <c:pt idx="13">
-                  <c:v>27.11</c:v>
+                  <c:v>28.99</c:v>
                 </c:pt>
                 <c:pt idx="14">
-                  <c:v>27.78</c:v>
+                  <c:v>29.18</c:v>
                 </c:pt>
                 <c:pt idx="15">
-                  <c:v>28.17</c:v>
+                  <c:v>29.34</c:v>
                 </c:pt>
                 <c:pt idx="16">
-                  <c:v>28.23</c:v>
+                  <c:v>29.42</c:v>
                 </c:pt>
                 <c:pt idx="17">
-                  <c:v>28.23</c:v>
+                  <c:v>29.42</c:v>
                 </c:pt>
                 <c:pt idx="18">
-                  <c:v>28.23</c:v>
+                  <c:v>29.42</c:v>
                 </c:pt>
                 <c:pt idx="19">
-                  <c:v>28.23</c:v>
+                  <c:v>29.42</c:v>
                 </c:pt>
                 <c:pt idx="20">
-                  <c:v>28.16</c:v>
+                  <c:v>29.42</c:v>
                 </c:pt>
                 <c:pt idx="21">
-                  <c:v>28.23</c:v>
+                  <c:v>29.34</c:v>
                 </c:pt>
                 <c:pt idx="22">
-                  <c:v>28.23</c:v>
+                  <c:v>29.42</c:v>
                 </c:pt>
                 <c:pt idx="23">
-                  <c:v>28.23</c:v>
+                  <c:v>29.42</c:v>
                 </c:pt>
                 <c:pt idx="24">
-                  <c:v>28.23</c:v>
+                  <c:v>29.42</c:v>
                 </c:pt>
                 <c:pt idx="25">
-                  <c:v>28.23</c:v>
+                  <c:v>29.42</c:v>
                 </c:pt>
                 <c:pt idx="26">
-                  <c:v>28.23</c:v>
+                  <c:v>29.42</c:v>
                 </c:pt>
                 <c:pt idx="27">
-                  <c:v>28.23</c:v>
+                  <c:v>29.42</c:v>
                 </c:pt>
                 <c:pt idx="28">
-                  <c:v>28.23</c:v>
+                  <c:v>29.42</c:v>
+                </c:pt>
+                <c:pt idx="29">
+                  <c:v>29.42</c:v>
+                </c:pt>
+                <c:pt idx="30">
+                  <c:v>29.42</c:v>
+                </c:pt>
+                <c:pt idx="31">
+                  <c:v>29.42</c:v>
                 </c:pt>
               </c:numCache>
             </c:numRef>
@@ -3341,8 +3411,8 @@
         <c:axId val="48650112"/>
         <c:scaling>
           <c:orientation val="minMax"/>
-          <c:max val="35"/>
-          <c:min val="5"/>
+          <c:max val="40"/>
+          <c:min val="0"/>
         </c:scaling>
         <c:delete val="0"/>
         <c:axPos val="b"/>
@@ -3493,7 +3563,15 @@
           <c:idx val="0"/>
           <c:order val="0"/>
           <c:tx>
-            <c:v>Encode</c:v>
+            <c:strRef>
+              <c:f>Sheet1!$B$1</c:f>
+              <c:strCache>
+                <c:ptCount val="1"/>
+                <c:pt idx="0">
+                  <c:v>Encode 38.20 ms</c:v>
+                </c:pt>
+              </c:strCache>
+            </c:strRef>
           </c:tx>
           <c:spPr>
             <a:solidFill xmlns:a="http://schemas.openxmlformats.org/drawingml/2006/main">
@@ -3506,7 +3584,7 @@
           <c:invertIfNegative val="0"/>
           <c:cat>
             <c:strRef>
-              <c:f>'Chart Data'!$A$2:$A$2</c:f>
+              <c:f>Sheet1!$A$2:$A$2</c:f>
               <c:strCache>
                 <c:ptCount val="1"/>
                 <c:pt idx="0">
@@ -3517,7 +3595,7 @@
           </c:cat>
           <c:val>
             <c:numRef>
-              <c:f>'Chart Data'!$B$2:$B$2</c:f>
+              <c:f>Sheet1!$B$2:$B$2</c:f>
               <c:numCache>
                 <c:formatCode>General</c:formatCode>
                 <c:ptCount val="1"/>
@@ -3532,7 +3610,15 @@
           <c:idx val="1"/>
           <c:order val="1"/>
           <c:tx>
-            <c:v>Transfer</c:v>
+            <c:strRef>
+              <c:f>Sheet1!$C$1</c:f>
+              <c:strCache>
+                <c:ptCount val="1"/>
+                <c:pt idx="0">
+                  <c:v>Transfer 2.90 ms</c:v>
+                </c:pt>
+              </c:strCache>
+            </c:strRef>
           </c:tx>
           <c:spPr>
             <a:solidFill xmlns:a="http://schemas.openxmlformats.org/drawingml/2006/main">
@@ -3545,7 +3631,7 @@
           <c:invertIfNegative val="0"/>
           <c:cat>
             <c:strRef>
-              <c:f>'Chart Data'!$C$2:$C$2</c:f>
+              <c:f>Sheet1!$A$2:$A$2</c:f>
               <c:strCache>
                 <c:ptCount val="1"/>
                 <c:pt idx="0">
@@ -3556,12 +3642,12 @@
           </c:cat>
           <c:val>
             <c:numRef>
-              <c:f>'Chart Data'!$D$2:$D$2</c:f>
+              <c:f>Sheet1!$C$2:$C$2</c:f>
               <c:numCache>
                 <c:formatCode>General</c:formatCode>
                 <c:ptCount val="1"/>
                 <c:pt idx="0">
-                  <c:v>2.87</c:v>
+                  <c:v>2.9</c:v>
                 </c:pt>
               </c:numCache>
             </c:numRef>
@@ -3571,7 +3657,15 @@
           <c:idx val="2"/>
           <c:order val="2"/>
           <c:tx>
-            <c:v>Decode</c:v>
+            <c:strRef>
+              <c:f>Sheet1!$D$1</c:f>
+              <c:strCache>
+                <c:ptCount val="1"/>
+                <c:pt idx="0">
+                  <c:v>Decode 26.39 ms</c:v>
+                </c:pt>
+              </c:strCache>
+            </c:strRef>
           </c:tx>
           <c:spPr>
             <a:solidFill xmlns:a="http://schemas.openxmlformats.org/drawingml/2006/main">
@@ -3584,7 +3678,7 @@
           <c:invertIfNegative val="0"/>
           <c:cat>
             <c:strRef>
-              <c:f>'Chart Data'!$E$2:$E$2</c:f>
+              <c:f>Sheet1!$A$2:$A$2</c:f>
               <c:strCache>
                 <c:ptCount val="1"/>
                 <c:pt idx="0">
@@ -3595,12 +3689,12 @@
           </c:cat>
           <c:val>
             <c:numRef>
-              <c:f>'Chart Data'!$F$2:$F$2</c:f>
+              <c:f>Sheet1!$D$2:$D$2</c:f>
               <c:numCache>
                 <c:formatCode>General</c:formatCode>
                 <c:ptCount val="1"/>
                 <c:pt idx="0">
-                  <c:v>30.39</c:v>
+                  <c:v>26.39</c:v>
                 </c:pt>
               </c:numCache>
             </c:numRef>
@@ -3777,6 +3871,10 @@
             <a:noFill/>
           </a:ln>
         </p:spPr>
+        <p:txBody xmlns:a="http://schemas.openxmlformats.org/drawingml/2006/main">
+          <a:bodyPr/>
+          <a:p/>
+        </p:txBody>
       </p:sp>
       <p:sp>
         <p:nvSpPr>
@@ -3809,6 +3907,10 @@
             <a:noFill/>
           </a:ln>
         </p:spPr>
+        <p:txBody xmlns:a="http://schemas.openxmlformats.org/drawingml/2006/main">
+          <a:bodyPr/>
+          <a:p/>
+        </p:txBody>
       </p:sp>
       <p:sp>
         <p:nvSpPr>
@@ -3841,6 +3943,10 @@
             <a:noFill/>
           </a:ln>
         </p:spPr>
+        <p:txBody xmlns:a="http://schemas.openxmlformats.org/drawingml/2006/main">
+          <a:bodyPr/>
+          <a:p/>
+        </p:txBody>
       </p:sp>
       <p:sp>
         <p:nvSpPr>
@@ -3873,6 +3979,10 @@
             <a:noFill/>
           </a:ln>
         </p:spPr>
+        <p:txBody xmlns:a="http://schemas.openxmlformats.org/drawingml/2006/main">
+          <a:bodyPr/>
+          <a:p/>
+        </p:txBody>
       </p:sp>
       <p:sp>
         <p:nvSpPr>
@@ -3905,6 +4015,10 @@
             <a:noFill/>
           </a:ln>
         </p:spPr>
+        <p:txBody xmlns:a="http://schemas.openxmlformats.org/drawingml/2006/main">
+          <a:bodyPr/>
+          <a:p/>
+        </p:txBody>
       </p:sp>
       <p:sp>
         <p:nvSpPr>
@@ -3937,6 +4051,10 @@
             <a:noFill/>
           </a:ln>
         </p:spPr>
+        <p:txBody xmlns:a="http://schemas.openxmlformats.org/drawingml/2006/main">
+          <a:bodyPr/>
+          <a:p/>
+        </p:txBody>
       </p:sp>
       <p:sp>
         <p:nvSpPr>
@@ -3969,6 +4087,10 @@
             <a:noFill/>
           </a:ln>
         </p:spPr>
+        <p:txBody xmlns:a="http://schemas.openxmlformats.org/drawingml/2006/main">
+          <a:bodyPr/>
+          <a:p/>
+        </p:txBody>
       </p:sp>
       <p:sp>
         <p:nvSpPr>
@@ -4001,6 +4123,10 @@
             <a:noFill/>
           </a:ln>
         </p:spPr>
+        <p:txBody xmlns:a="http://schemas.openxmlformats.org/drawingml/2006/main">
+          <a:bodyPr/>
+          <a:p/>
+        </p:txBody>
       </p:sp>
       <p:cxnSp>
         <p:nvCxnSpPr>
@@ -4633,7 +4759,7 @@
                 <a:ea typeface="Calibri"/>
                 <a:cs typeface="Calibri"/>
               </a:rPr>
-              <a:t>18,000 frames in 600.06 s</a:t>
+              <a:t>18,020 frames in 600 s</a:t>
             </a:r>
           </a:p>
         </p:txBody>
@@ -4701,7 +4827,7 @@
                 <a:ea typeface="Calibri"/>
                 <a:cs typeface="Calibri"/>
               </a:rPr>
-              <a:t>71.5 ms</a:t>
+              <a:t>67.5 ms</a:t>
             </a:r>
           </a:p>
         </p:txBody>
@@ -4860,7 +4986,7 @@
                 <a:ea typeface="Calibri"/>
                 <a:cs typeface="Calibri"/>
               </a:rPr>
-              <a:t>+3.8 dB</a:t>
+              <a:t>+2.8 dB</a:t>
             </a:r>
           </a:p>
         </p:txBody>
@@ -5310,6 +5436,10 @@
             </a:solidFill>
           </a:ln>
         </p:spPr>
+        <p:txBody xmlns:a="http://schemas.openxmlformats.org/drawingml/2006/main">
+          <a:bodyPr/>
+          <a:p/>
+        </p:txBody>
       </p:sp>
       <p:sp>
         <p:nvSpPr>
@@ -5478,6 +5608,10 @@
             </a:solidFill>
           </a:ln>
         </p:spPr>
+        <p:txBody xmlns:a="http://schemas.openxmlformats.org/drawingml/2006/main">
+          <a:bodyPr/>
+          <a:p/>
+        </p:txBody>
       </p:sp>
       <p:sp>
         <p:nvSpPr>
@@ -5646,6 +5780,10 @@
             </a:solidFill>
           </a:ln>
         </p:spPr>
+        <p:txBody xmlns:a="http://schemas.openxmlformats.org/drawingml/2006/main">
+          <a:bodyPr/>
+          <a:p/>
+        </p:txBody>
       </p:sp>
       <p:sp>
         <p:nvSpPr>
@@ -5814,6 +5952,10 @@
             </a:solidFill>
           </a:ln>
         </p:spPr>
+        <p:txBody xmlns:a="http://schemas.openxmlformats.org/drawingml/2006/main">
+          <a:bodyPr/>
+          <a:p/>
+        </p:txBody>
       </p:sp>
       <p:sp>
         <p:nvSpPr>
@@ -5982,6 +6124,10 @@
             </a:solidFill>
           </a:ln>
         </p:spPr>
+        <p:txBody xmlns:a="http://schemas.openxmlformats.org/drawingml/2006/main">
+          <a:bodyPr/>
+          <a:p/>
+        </p:txBody>
       </p:sp>
       <p:sp>
         <p:nvSpPr>
@@ -6150,6 +6296,10 @@
             </a:solidFill>
           </a:ln>
         </p:spPr>
+        <p:txBody xmlns:a="http://schemas.openxmlformats.org/drawingml/2006/main">
+          <a:bodyPr/>
+          <a:p/>
+        </p:txBody>
       </p:sp>
       <p:sp>
         <p:nvSpPr>
@@ -6318,6 +6468,10 @@
             </a:solidFill>
           </a:ln>
         </p:spPr>
+        <p:txBody xmlns:a="http://schemas.openxmlformats.org/drawingml/2006/main">
+          <a:bodyPr/>
+          <a:p/>
+        </p:txBody>
       </p:sp>
       <p:sp>
         <p:nvSpPr>
@@ -6486,6 +6640,10 @@
             </a:solidFill>
           </a:ln>
         </p:spPr>
+        <p:txBody xmlns:a="http://schemas.openxmlformats.org/drawingml/2006/main">
+          <a:bodyPr/>
+          <a:p/>
+        </p:txBody>
       </p:sp>
       <p:sp>
         <p:nvSpPr>
@@ -7118,7 +7276,7 @@
                 <a:ea typeface="Calibri"/>
                 <a:cs typeface="Calibri"/>
               </a:rPr>
-              <a:t>SSCC: JPEG + convolutional code + 64-QAM.</a:t>
+              <a:t>SSCC: JPEG + 802.11n LDPC + 64-QAM.</a:t>
             </a:r>
           </a:p>
         </p:txBody>
@@ -7463,7 +7621,7 @@
                 <a:ea typeface="Calibri"/>
                 <a:cs typeface="Calibri"/>
               </a:rPr>
-              <a:t>32.3 dB</a:t>
+              <a:t>36.1 dB</a:t>
             </a:r>
           </a:p>
         </p:txBody>
@@ -7531,7 +7689,7 @@
                 <a:ea typeface="Calibri"/>
                 <a:cs typeface="Calibri"/>
               </a:rPr>
-              <a:t>17.4 dB</a:t>
+              <a:t>14.2 dB</a:t>
             </a:r>
           </a:p>
         </p:txBody>
@@ -7599,7 +7757,7 @@
                 <a:ea typeface="Calibri"/>
                 <a:cs typeface="Calibri"/>
               </a:rPr>
-              <a:t>13.1 dB</a:t>
+              <a:t>10.5 dB</a:t>
             </a:r>
           </a:p>
         </p:txBody>
@@ -7667,7 +7825,7 @@
                 <a:ea typeface="Calibri"/>
                 <a:cs typeface="Calibri"/>
               </a:rPr>
-              <a:t>5.5 dB</a:t>
+              <a:t>2.9 dB</a:t>
             </a:r>
           </a:p>
         </p:txBody>
@@ -7899,7 +8057,7 @@
                 <a:ea typeface="Calibri"/>
                 <a:cs typeface="Calibri"/>
               </a:rPr>
-              <a:t>31.99 / 0.94</a:t>
+              <a:t>32.21 / 0.94</a:t>
             </a:r>
           </a:p>
         </p:txBody>
@@ -7995,7 +8153,7 @@
                 <a:ea typeface="Calibri"/>
                 <a:cs typeface="Calibri"/>
               </a:rPr>
-              <a:t>31.66 / 0.94</a:t>
+              <a:t>31.46 / 0.94</a:t>
             </a:r>
           </a:p>
         </p:txBody>
@@ -8091,7 +8249,7 @@
                 <a:ea typeface="Calibri"/>
                 <a:cs typeface="Calibri"/>
               </a:rPr>
-              <a:t>31.19 / 0.93</a:t>
+              <a:t>30.41 / 0.93</a:t>
             </a:r>
           </a:p>
         </p:txBody>
@@ -8187,7 +8345,7 @@
                 <a:ea typeface="Calibri"/>
                 <a:cs typeface="Calibri"/>
               </a:rPr>
-              <a:t>26.55 / 0.87</a:t>
+              <a:t>23.51 / 0.77</a:t>
             </a:r>
           </a:p>
         </p:txBody>
@@ -8283,7 +8441,7 @@
                 <a:ea typeface="Calibri"/>
                 <a:cs typeface="Calibri"/>
               </a:rPr>
-              <a:t>28.23 / 0.83</a:t>
+              <a:t>29.42 / 0.86</a:t>
             </a:r>
           </a:p>
         </p:txBody>
@@ -8379,7 +8537,7 @@
                 <a:ea typeface="Calibri"/>
                 <a:cs typeface="Calibri"/>
               </a:rPr>
-              <a:t>22.06 / 0.78</a:t>
+              <a:t>14.33 / 0.63</a:t>
             </a:r>
           </a:p>
         </p:txBody>
@@ -8475,7 +8633,7 @@
                 <a:ea typeface="Calibri"/>
                 <a:cs typeface="Calibri"/>
               </a:rPr>
-              <a:t>8.01 / 0.12</a:t>
+              <a:t>9.48 / 0.16</a:t>
             </a:r>
           </a:p>
         </p:txBody>
@@ -8509,6 +8667,10 @@
             <a:noFill/>
           </a:ln>
         </p:spPr>
+        <p:txBody xmlns:a="http://schemas.openxmlformats.org/drawingml/2006/main">
+          <a:bodyPr/>
+          <a:p/>
+        </p:txBody>
       </p:sp>
       <p:sp>
         <p:nvSpPr>
@@ -8732,7 +8894,7 @@
                 <a:ea typeface="Calibri"/>
                 <a:cs typeface="Calibri"/>
               </a:rPr>
-              <a:t>Matched TX attenuation; column SNR averages both schemes.</a:t>
+              <a:t>Matched TX attenuation; column SNR of the DeepJSCC-Q frames.</a:t>
             </a:r>
           </a:p>
           <a:p xmlns:a="http://schemas.openxmlformats.org/drawingml/2006/main">
@@ -8914,7 +9076,7 @@
                 <a:ea typeface="Calibri"/>
                 <a:cs typeface="Calibri"/>
               </a:rPr>
-              <a:t>250 MHz, W8A12, 2.33 GMAC/frame</a:t>
+              <a:t>250 MHz, W8A12, 1.15 GMAC/frame</a:t>
             </a:r>
           </a:p>
         </p:txBody>
@@ -8950,6 +9112,10 @@
             </a:solidFill>
           </a:ln>
         </p:spPr>
+        <p:txBody xmlns:a="http://schemas.openxmlformats.org/drawingml/2006/main">
+          <a:bodyPr/>
+          <a:p/>
+        </p:txBody>
       </p:sp>
       <p:sp>
         <p:nvSpPr>
@@ -9118,6 +9284,10 @@
             </a:solidFill>
           </a:ln>
         </p:spPr>
+        <p:txBody xmlns:a="http://schemas.openxmlformats.org/drawingml/2006/main">
+          <a:bodyPr/>
+          <a:p/>
+        </p:txBody>
       </p:sp>
       <p:sp>
         <p:nvSpPr>
@@ -9286,6 +9456,10 @@
             </a:solidFill>
           </a:ln>
         </p:spPr>
+        <p:txBody xmlns:a="http://schemas.openxmlformats.org/drawingml/2006/main">
+          <a:bodyPr/>
+          <a:p/>
+        </p:txBody>
       </p:sp>
       <p:sp>
         <p:nvSpPr>
@@ -9454,6 +9628,10 @@
             </a:solidFill>
           </a:ln>
         </p:spPr>
+        <p:txBody xmlns:a="http://schemas.openxmlformats.org/drawingml/2006/main">
+          <a:bodyPr/>
+          <a:p/>
+        </p:txBody>
       </p:sp>
       <p:sp>
         <p:nvSpPr>
@@ -9622,6 +9800,10 @@
             </a:solidFill>
           </a:ln>
         </p:spPr>
+        <p:txBody xmlns:a="http://schemas.openxmlformats.org/drawingml/2006/main">
+          <a:bodyPr/>
+          <a:p/>
+        </p:txBody>
       </p:sp>
       <p:sp>
         <p:nvSpPr>
@@ -10159,7 +10341,7 @@
                           <a:ea typeface="Calibri"/>
                           <a:cs typeface="Calibri"/>
                         </a:rPr>
-                        <a:t>52,679</a:t>
+                        <a:t>54,246</a:t>
                       </a:r>
                     </a:p>
                   </a:txBody>
@@ -10352,7 +10534,7 @@
                           <a:ea typeface="Calibri"/>
                           <a:cs typeface="Calibri"/>
                         </a:rPr>
-                        <a:t>70,768</a:t>
+                        <a:t>63,691</a:t>
                       </a:r>
                     </a:p>
                   </a:txBody>
@@ -10389,7 +10571,7 @@
                           <a:ea typeface="Calibri"/>
                           <a:cs typeface="Calibri"/>
                         </a:rPr>
-                        <a:t>123.5</a:t>
+                        <a:t>65.5</a:t>
                       </a:r>
                     </a:p>
                   </a:txBody>
@@ -10426,7 +10608,7 @@
                           <a:ea typeface="Calibri"/>
                           <a:cs typeface="Calibri"/>
                         </a:rPr>
-                        <a:t>25</a:t>
+                        <a:t>7</a:t>
                       </a:r>
                     </a:p>
                   </a:txBody>
@@ -10463,7 +10645,7 @@
                           <a:ea typeface="Calibri"/>
                           <a:cs typeface="Calibri"/>
                         </a:rPr>
-                        <a:t>394</a:t>
+                        <a:t>133</a:t>
                       </a:r>
                     </a:p>
                   </a:txBody>
@@ -10553,7 +10735,7 @@
                 <a:ea typeface="Calibri"/>
                 <a:cs typeface="Calibri"/>
               </a:rPr>
-              <a:t>Measured rails: TX 3.06 W / RX 3.71 W</a:t>
+              <a:t>Measured rails: TX 3.07 W / RX 3.44 W</a:t>
             </a:r>
           </a:p>
           <a:p xmlns:a="http://schemas.openxmlformats.org/drawingml/2006/main">
@@ -10644,7 +10826,7 @@
                 <a:ea typeface="Calibri"/>
                 <a:cs typeface="Calibri"/>
               </a:rPr>
-              <a:t>PL frame latency: 71.5 ms</a:t>
+              <a:t>PL frame latency: 67.5 ms</a:t>
             </a:r>
           </a:p>
         </p:txBody>
@@ -10700,6 +10882,10 @@
             <a:noFill/>
           </a:ln>
         </p:spPr>
+        <p:txBody xmlns:a="http://schemas.openxmlformats.org/drawingml/2006/main">
+          <a:bodyPr/>
+          <a:p/>
+        </p:txBody>
       </p:sp>
       <p:sp>
         <p:nvSpPr>
@@ -10798,6 +10984,10 @@
             <a:noFill/>
           </a:ln>
         </p:spPr>
+        <p:txBody xmlns:a="http://schemas.openxmlformats.org/drawingml/2006/main">
+          <a:bodyPr/>
+          <a:p/>
+        </p:txBody>
       </p:sp>
       <p:sp>
         <p:nvSpPr>
@@ -10862,7 +11052,7 @@
                 <a:ea typeface="Calibri"/>
                 <a:cs typeface="Calibri"/>
               </a:rPr>
-              <a:t>Transfer 2.87</a:t>
+              <a:t>Transfer 2.90</a:t>
             </a:r>
           </a:p>
         </p:txBody>
@@ -10896,6 +11086,10 @@
             <a:noFill/>
           </a:ln>
         </p:spPr>
+        <p:txBody xmlns:a="http://schemas.openxmlformats.org/drawingml/2006/main">
+          <a:bodyPr/>
+          <a:p/>
+        </p:txBody>
       </p:sp>
       <p:sp>
         <p:nvSpPr>
@@ -10960,7 +11154,7 @@
                 <a:ea typeface="Calibri"/>
                 <a:cs typeface="Calibri"/>
               </a:rPr>
-              <a:t>Decode 30.39</a:t>
+              <a:t>Decode 26.39</a:t>
             </a:r>
           </a:p>
         </p:txBody>

--- a/report/poster/poster_en_a4_large_text.pptx
+++ b/report/poster/poster_en_a4_large_text.pptx
@@ -5166,6 +5166,7 @@
         </p:nvPicPr>
         <p:blipFill>
           <a:blip xmlns:r="http://schemas.openxmlformats.org/officeDocument/2006/relationships" xmlns:a="http://schemas.openxmlformats.org/drawingml/2006/main" r:embed="Rcff13fd1cd914d80"/>
+          <a:srcRect xmlns:a="http://schemas.openxmlformats.org/drawingml/2006/main"/>
           <a:stretch xmlns:a="http://schemas.openxmlformats.org/drawingml/2006/main"/>
         </p:blipFill>
         <p:spPr>

--- a/report/poster/poster_en_a4_large_text.pptx
+++ b/report/poster/poster_en_a4_large_text.pptx
@@ -6089,7 +6089,7 @@
                 <a:ea typeface="Calibri"/>
                 <a:cs typeface="Calibri"/>
               </a:rPr>
-              <a:t>915 MHz</a:t>
+              <a:t>20 MSPS</a:t>
             </a:r>
           </a:p>
         </p:txBody>

--- a/report/poster/poster_en_a4_large_text.pptx
+++ b/report/poster/poster_en_a4_large_text.pptx
@@ -10342,7 +10342,7 @@
                           <a:ea typeface="Calibri"/>
                           <a:cs typeface="Calibri"/>
                         </a:rPr>
-                        <a:t>54,246</a:t>
+                        <a:t>54,241</a:t>
                       </a:r>
                     </a:p>
                   </a:txBody>
@@ -10535,7 +10535,7 @@
                           <a:ea typeface="Calibri"/>
                           <a:cs typeface="Calibri"/>
                         </a:rPr>
-                        <a:t>63,691</a:t>
+                        <a:t>63,699</a:t>
                       </a:r>
                     </a:p>
                   </a:txBody>
